--- a/src/logo-v2.pptx
+++ b/src/logo-v2.pptx
@@ -5,13 +5,14 @@
     <p:sldMasterId id="2147483648" r:id="rId1"/>
   </p:sldMasterIdLst>
   <p:notesMasterIdLst>
-    <p:notesMasterId r:id="rId4"/>
+    <p:notesMasterId r:id="rId5"/>
   </p:notesMasterIdLst>
   <p:handoutMasterIdLst>
-    <p:handoutMasterId r:id="rId5"/>
+    <p:handoutMasterId r:id="rId6"/>
   </p:handoutMasterIdLst>
   <p:sldIdLst>
     <p:sldId id="256" r:id="rId3"/>
+    <p:sldId id="258" r:id="rId4"/>
   </p:sldIdLst>
   <p:sldSz cx="12192000" cy="6858000"/>
   <p:notesSz cx="7103745" cy="10234295"/>
@@ -113,7 +114,7 @@
   <p:extLst>
     <p:ext uri="{EFAFB233-063F-42B5-8137-9DF3F51BA10A}">
       <p15:sldGuideLst xmlns:p15="http://schemas.microsoft.com/office/powerpoint/2012/main">
-        <p15:guide id="1" orient="horz" pos="2159" userDrawn="1">
+        <p15:guide id="1" orient="horz" pos="2160" userDrawn="1">
           <p15:clr>
             <a:srgbClr val="A4A3A4"/>
           </p15:clr>
@@ -3485,7 +3486,7 @@
         </p:nvSpPr>
         <p:spPr>
           <a:xfrm>
-            <a:off x="4047490" y="1607185"/>
+            <a:off x="4047490" y="1380490"/>
             <a:ext cx="4097655" cy="4097655"/>
           </a:xfrm>
           <a:prstGeom prst="roundRect">
@@ -3541,7 +3542,7 @@
         </p:nvSpPr>
         <p:spPr>
           <a:xfrm>
-            <a:off x="4064318" y="2176780"/>
+            <a:off x="4064318" y="1950085"/>
             <a:ext cx="4064000" cy="1938020"/>
           </a:xfrm>
           <a:prstGeom prst="rect">
@@ -3622,7 +3623,249 @@
         </p:nvSpPr>
         <p:spPr>
           <a:xfrm>
-            <a:off x="4907598" y="3849370"/>
+            <a:off x="4907598" y="3622675"/>
+            <a:ext cx="2377440" cy="1198880"/>
+          </a:xfrm>
+          <a:prstGeom prst="rect">
+            <a:avLst/>
+          </a:prstGeom>
+          <a:noFill/>
+          <a:ln>
+            <a:noFill/>
+          </a:ln>
+          <a:effectLst>
+            <a:outerShdw blurRad="50800" dist="38100" dir="2700000" algn="tl" rotWithShape="0">
+              <a:prstClr val="black">
+                <a:alpha val="40000"/>
+              </a:prstClr>
+            </a:outerShdw>
+          </a:effectLst>
+        </p:spPr>
+        <p:txBody>
+          <a:bodyPr wrap="none" rtlCol="0" anchor="t">
+            <a:spAutoFit/>
+          </a:bodyPr>
+          <a:p>
+            <a:pPr algn="ctr"/>
+            <a:r>
+              <a:rPr lang="en-US" altLang="zh-CN" sz="7200" b="1">
+                <a:ln w="6600">
+                  <a:solidFill>
+                    <a:schemeClr val="accent2"/>
+                  </a:solidFill>
+                  <a:prstDash val="solid"/>
+                </a:ln>
+                <a:solidFill>
+                  <a:srgbClr val="FFFFFF"/>
+                </a:solidFill>
+                <a:effectLst>
+                  <a:outerShdw dist="38100" dir="2700000" algn="tl" rotWithShape="0">
+                    <a:schemeClr val="accent2"/>
+                  </a:outerShdw>
+                </a:effectLst>
+                <a:latin typeface="JetBrainsMono Nerd Font Mono" panose="02000009000000000000" charset="0"/>
+                <a:cs typeface="JetBrainsMono Nerd Font Mono" panose="02000009000000000000" charset="0"/>
+              </a:rPr>
+              <a:t>next</a:t>
+            </a:r>
+            <a:endParaRPr lang="en-US" altLang="zh-CN" sz="7200" b="1">
+              <a:ln w="6600">
+                <a:solidFill>
+                  <a:schemeClr val="accent2"/>
+                </a:solidFill>
+                <a:prstDash val="solid"/>
+              </a:ln>
+              <a:solidFill>
+                <a:srgbClr val="FFFFFF"/>
+              </a:solidFill>
+              <a:effectLst>
+                <a:outerShdw dist="38100" dir="2700000" algn="tl" rotWithShape="0">
+                  <a:schemeClr val="accent2"/>
+                </a:outerShdw>
+              </a:effectLst>
+              <a:latin typeface="JetBrainsMono Nerd Font Mono" panose="02000009000000000000" charset="0"/>
+              <a:cs typeface="JetBrainsMono Nerd Font Mono" panose="02000009000000000000" charset="0"/>
+            </a:endParaRPr>
+          </a:p>
+        </p:txBody>
+      </p:sp>
+    </p:spTree>
+  </p:cSld>
+  <p:clrMapOvr>
+    <a:masterClrMapping/>
+  </p:clrMapOvr>
+</p:sld>
+</file>
+
+<file path=ppt/slides/slide2.xml><?xml version="1.0" encoding="utf-8"?>
+<p:sld xmlns:a="http://schemas.openxmlformats.org/drawingml/2006/main" xmlns:r="http://schemas.openxmlformats.org/officeDocument/2006/relationships" xmlns:p="http://schemas.openxmlformats.org/presentationml/2006/main">
+  <p:cSld>
+    <p:bg>
+      <p:bgPr>
+        <a:solidFill>
+          <a:schemeClr val="bg2">
+            <a:lumMod val="50000"/>
+          </a:schemeClr>
+        </a:solidFill>
+        <a:effectLst/>
+      </p:bgPr>
+    </p:bg>
+    <p:spTree>
+      <p:nvGrpSpPr>
+        <p:cNvPr id="1" name=""/>
+        <p:cNvGrpSpPr/>
+        <p:nvPr/>
+      </p:nvGrpSpPr>
+      <p:grpSpPr>
+        <a:xfrm>
+          <a:off x="0" y="0"/>
+          <a:ext cx="0" cy="0"/>
+          <a:chOff x="0" y="0"/>
+          <a:chExt cx="0" cy="0"/>
+        </a:xfrm>
+      </p:grpSpPr>
+      <p:sp>
+        <p:nvSpPr>
+          <p:cNvPr id="3" name="圆角矩形 2"/>
+          <p:cNvSpPr/>
+          <p:nvPr/>
+        </p:nvSpPr>
+        <p:spPr>
+          <a:xfrm>
+            <a:off x="4047490" y="1380490"/>
+            <a:ext cx="4097655" cy="4097655"/>
+          </a:xfrm>
+          <a:prstGeom prst="roundRect">
+            <a:avLst>
+              <a:gd name="adj" fmla="val 13776"/>
+            </a:avLst>
+          </a:prstGeom>
+          <a:solidFill>
+            <a:srgbClr val="202020"/>
+          </a:solidFill>
+          <a:ln w="88900">
+            <a:solidFill>
+              <a:srgbClr val="323232"/>
+            </a:solidFill>
+          </a:ln>
+          <a:effectLst>
+            <a:outerShdw blurRad="50800" dist="38100" dir="2700000" algn="tl" rotWithShape="0">
+              <a:prstClr val="black">
+                <a:alpha val="40000"/>
+              </a:prstClr>
+            </a:outerShdw>
+          </a:effectLst>
+        </p:spPr>
+        <p:style>
+          <a:lnRef idx="2">
+            <a:schemeClr val="accent1">
+              <a:lumMod val="75000"/>
+            </a:schemeClr>
+          </a:lnRef>
+          <a:fillRef idx="1">
+            <a:schemeClr val="accent1"/>
+          </a:fillRef>
+          <a:effectRef idx="0">
+            <a:srgbClr val="FFFFFF"/>
+          </a:effectRef>
+          <a:fontRef idx="minor">
+            <a:schemeClr val="lt1"/>
+          </a:fontRef>
+        </p:style>
+        <p:txBody>
+          <a:bodyPr rtlCol="0" anchor="ctr"/>
+          <a:p>
+            <a:pPr algn="ctr"/>
+            <a:endParaRPr lang="zh-CN" altLang="en-US"/>
+          </a:p>
+        </p:txBody>
+      </p:sp>
+      <p:sp>
+        <p:nvSpPr>
+          <p:cNvPr id="4" name="文本框 3"/>
+          <p:cNvSpPr txBox="1"/>
+          <p:nvPr/>
+        </p:nvSpPr>
+        <p:spPr>
+          <a:xfrm>
+            <a:off x="4064318" y="1950085"/>
+            <a:ext cx="4064000" cy="1938020"/>
+          </a:xfrm>
+          <a:prstGeom prst="rect">
+            <a:avLst/>
+          </a:prstGeom>
+          <a:noFill/>
+          <a:effectLst>
+            <a:outerShdw blurRad="50800" dist="38100" dir="2700000" algn="tl" rotWithShape="0">
+              <a:prstClr val="black">
+                <a:alpha val="40000"/>
+              </a:prstClr>
+            </a:outerShdw>
+          </a:effectLst>
+        </p:spPr>
+        <p:txBody>
+          <a:bodyPr wrap="square" rtlCol="0">
+            <a:spAutoFit/>
+            <a:scene3d>
+              <a:camera prst="orthographicFront"/>
+              <a:lightRig rig="threePt" dir="t"/>
+            </a:scene3d>
+          </a:bodyPr>
+          <a:p>
+            <a:pPr algn="ctr"/>
+            <a:r>
+              <a:rPr lang="en-US" altLang="zh-CN" sz="12000" b="1">
+                <a:ln w="15875"/>
+                <a:gradFill>
+                  <a:gsLst>
+                    <a:gs pos="0">
+                      <a:srgbClr val="F2E9CA"/>
+                    </a:gs>
+                    <a:gs pos="100000">
+                      <a:schemeClr val="bg1">
+                        <a:lumMod val="75000"/>
+                      </a:schemeClr>
+                    </a:gs>
+                  </a:gsLst>
+                  <a:lin ang="2700000" scaled="0"/>
+                </a:gradFill>
+                <a:effectLst/>
+                <a:latin typeface="Font Awesome 7 Brands" panose="02000503000000000000" charset="0"/>
+                <a:cs typeface="Font Awesome 7 Brands" panose="02000503000000000000" charset="0"/>
+              </a:rPr>
+              <a:t>123</a:t>
+            </a:r>
+            <a:endParaRPr lang="en-US" altLang="zh-CN" sz="12000" b="1">
+              <a:ln w="15875"/>
+              <a:gradFill>
+                <a:gsLst>
+                  <a:gs pos="0">
+                    <a:srgbClr val="F2E9CA"/>
+                  </a:gs>
+                  <a:gs pos="100000">
+                    <a:schemeClr val="bg1">
+                      <a:lumMod val="75000"/>
+                    </a:schemeClr>
+                  </a:gs>
+                </a:gsLst>
+                <a:lin ang="2700000" scaled="0"/>
+              </a:gradFill>
+              <a:effectLst/>
+              <a:latin typeface="Font Awesome 7 Brands" panose="02000503000000000000" charset="0"/>
+              <a:cs typeface="Font Awesome 7 Brands" panose="02000503000000000000" charset="0"/>
+            </a:endParaRPr>
+          </a:p>
+        </p:txBody>
+      </p:sp>
+      <p:sp>
+        <p:nvSpPr>
+          <p:cNvPr id="6" name="矩形 5"/>
+          <p:cNvSpPr/>
+          <p:nvPr/>
+        </p:nvSpPr>
+        <p:spPr>
+          <a:xfrm>
+            <a:off x="4907598" y="3622675"/>
             <a:ext cx="2377440" cy="1198880"/>
           </a:xfrm>
           <a:prstGeom prst="rect">

--- a/src/logo-v2.pptx
+++ b/src/logo-v2.pptx
@@ -5,14 +5,15 @@
     <p:sldMasterId id="2147483648" r:id="rId1"/>
   </p:sldMasterIdLst>
   <p:notesMasterIdLst>
-    <p:notesMasterId r:id="rId5"/>
+    <p:notesMasterId r:id="rId6"/>
   </p:notesMasterIdLst>
   <p:handoutMasterIdLst>
-    <p:handoutMasterId r:id="rId6"/>
+    <p:handoutMasterId r:id="rId7"/>
   </p:handoutMasterIdLst>
   <p:sldIdLst>
     <p:sldId id="256" r:id="rId3"/>
-    <p:sldId id="258" r:id="rId4"/>
+    <p:sldId id="259" r:id="rId4"/>
+    <p:sldId id="258" r:id="rId5"/>
   </p:sldIdLst>
   <p:sldSz cx="12192000" cy="6858000"/>
   <p:notesSz cx="7103745" cy="10234295"/>
@@ -3698,6 +3699,250 @@
 </file>
 
 <file path=ppt/slides/slide2.xml><?xml version="1.0" encoding="utf-8"?>
+<p:sld xmlns:a="http://schemas.openxmlformats.org/drawingml/2006/main" xmlns:r="http://schemas.openxmlformats.org/officeDocument/2006/relationships" xmlns:p="http://schemas.openxmlformats.org/presentationml/2006/main">
+  <p:cSld>
+    <p:bg>
+      <p:bgPr>
+        <a:solidFill>
+          <a:schemeClr val="bg2">
+            <a:lumMod val="50000"/>
+          </a:schemeClr>
+        </a:solidFill>
+        <a:effectLst/>
+      </p:bgPr>
+    </p:bg>
+    <p:spTree>
+      <p:nvGrpSpPr>
+        <p:cNvPr id="1" name=""/>
+        <p:cNvGrpSpPr/>
+        <p:nvPr/>
+      </p:nvGrpSpPr>
+      <p:grpSpPr>
+        <a:xfrm>
+          <a:off x="0" y="0"/>
+          <a:ext cx="0" cy="0"/>
+          <a:chOff x="0" y="0"/>
+          <a:chExt cx="0" cy="0"/>
+        </a:xfrm>
+      </p:grpSpPr>
+      <p:sp>
+        <p:nvSpPr>
+          <p:cNvPr id="3" name="圆角矩形 2"/>
+          <p:cNvSpPr/>
+          <p:nvPr/>
+        </p:nvSpPr>
+        <p:spPr>
+          <a:xfrm>
+            <a:off x="4047490" y="1380490"/>
+            <a:ext cx="4097655" cy="4097655"/>
+          </a:xfrm>
+          <a:prstGeom prst="roundRect">
+            <a:avLst>
+              <a:gd name="adj" fmla="val 4556"/>
+            </a:avLst>
+          </a:prstGeom>
+          <a:solidFill>
+            <a:srgbClr val="202020"/>
+          </a:solidFill>
+          <a:ln w="88900">
+            <a:noFill/>
+          </a:ln>
+          <a:effectLst>
+            <a:outerShdw blurRad="50800" dist="38100" dir="2700000" algn="tl" rotWithShape="0">
+              <a:prstClr val="black">
+                <a:alpha val="40000"/>
+              </a:prstClr>
+            </a:outerShdw>
+          </a:effectLst>
+        </p:spPr>
+        <p:style>
+          <a:lnRef idx="2">
+            <a:schemeClr val="accent1">
+              <a:lumMod val="75000"/>
+            </a:schemeClr>
+          </a:lnRef>
+          <a:fillRef idx="1">
+            <a:schemeClr val="accent1"/>
+          </a:fillRef>
+          <a:effectRef idx="0">
+            <a:srgbClr val="FFFFFF"/>
+          </a:effectRef>
+          <a:fontRef idx="minor">
+            <a:schemeClr val="lt1"/>
+          </a:fontRef>
+        </p:style>
+        <p:txBody>
+          <a:bodyPr rtlCol="0" anchor="ctr"/>
+          <a:p>
+            <a:pPr algn="ctr"/>
+            <a:endParaRPr lang="zh-CN" altLang="en-US"/>
+          </a:p>
+        </p:txBody>
+      </p:sp>
+      <p:sp>
+        <p:nvSpPr>
+          <p:cNvPr id="4" name="文本框 3"/>
+          <p:cNvSpPr txBox="1"/>
+          <p:nvPr/>
+        </p:nvSpPr>
+        <p:spPr>
+          <a:xfrm>
+            <a:off x="4064318" y="1950085"/>
+            <a:ext cx="4064000" cy="1938020"/>
+          </a:xfrm>
+          <a:prstGeom prst="rect">
+            <a:avLst/>
+          </a:prstGeom>
+          <a:noFill/>
+          <a:effectLst>
+            <a:outerShdw blurRad="50800" dist="38100" dir="2700000" algn="tl" rotWithShape="0">
+              <a:prstClr val="black">
+                <a:alpha val="40000"/>
+              </a:prstClr>
+            </a:outerShdw>
+          </a:effectLst>
+        </p:spPr>
+        <p:txBody>
+          <a:bodyPr wrap="square" rtlCol="0">
+            <a:spAutoFit/>
+            <a:scene3d>
+              <a:camera prst="orthographicFront"/>
+              <a:lightRig rig="threePt" dir="t"/>
+            </a:scene3d>
+          </a:bodyPr>
+          <a:p>
+            <a:pPr algn="ctr"/>
+            <a:r>
+              <a:rPr lang="en-US" altLang="zh-CN" sz="12000" b="1">
+                <a:ln w="15875"/>
+                <a:gradFill>
+                  <a:gsLst>
+                    <a:gs pos="0">
+                      <a:schemeClr val="accent1">
+                        <a:hueMod val="80000"/>
+                      </a:schemeClr>
+                    </a:gs>
+                    <a:gs pos="100000">
+                      <a:schemeClr val="accent1">
+                        <a:alpha val="100000"/>
+                      </a:schemeClr>
+                    </a:gs>
+                  </a:gsLst>
+                  <a:lin ang="2700000" scaled="0"/>
+                </a:gradFill>
+                <a:effectLst/>
+                <a:latin typeface="Font Awesome 7 Brands" panose="02000503000000000000" charset="0"/>
+                <a:cs typeface="Font Awesome 7 Brands" panose="02000503000000000000" charset="0"/>
+              </a:rPr>
+              <a:t>123</a:t>
+            </a:r>
+            <a:endParaRPr lang="en-US" altLang="zh-CN" sz="12000" b="1">
+              <a:ln w="15875"/>
+              <a:gradFill>
+                <a:gsLst>
+                  <a:gs pos="0">
+                    <a:schemeClr val="accent1">
+                      <a:hueMod val="80000"/>
+                    </a:schemeClr>
+                  </a:gs>
+                  <a:gs pos="100000">
+                    <a:schemeClr val="accent1">
+                      <a:alpha val="100000"/>
+                    </a:schemeClr>
+                  </a:gs>
+                </a:gsLst>
+                <a:lin ang="2700000" scaled="0"/>
+              </a:gradFill>
+              <a:effectLst/>
+              <a:latin typeface="Font Awesome 7 Brands" panose="02000503000000000000" charset="0"/>
+              <a:cs typeface="Font Awesome 7 Brands" panose="02000503000000000000" charset="0"/>
+            </a:endParaRPr>
+          </a:p>
+        </p:txBody>
+      </p:sp>
+      <p:sp>
+        <p:nvSpPr>
+          <p:cNvPr id="6" name="矩形 5"/>
+          <p:cNvSpPr/>
+          <p:nvPr/>
+        </p:nvSpPr>
+        <p:spPr>
+          <a:xfrm>
+            <a:off x="4907598" y="3622675"/>
+            <a:ext cx="2377440" cy="1198880"/>
+          </a:xfrm>
+          <a:prstGeom prst="rect">
+            <a:avLst/>
+          </a:prstGeom>
+          <a:noFill/>
+          <a:ln>
+            <a:noFill/>
+          </a:ln>
+          <a:effectLst>
+            <a:outerShdw blurRad="50800" dist="38100" dir="2700000" algn="tl" rotWithShape="0">
+              <a:prstClr val="black">
+                <a:alpha val="40000"/>
+              </a:prstClr>
+            </a:outerShdw>
+          </a:effectLst>
+        </p:spPr>
+        <p:txBody>
+          <a:bodyPr wrap="none" rtlCol="0" anchor="t">
+            <a:spAutoFit/>
+          </a:bodyPr>
+          <a:p>
+            <a:pPr algn="ctr"/>
+            <a:r>
+              <a:rPr lang="en-US" altLang="zh-CN" sz="7200" b="1">
+                <a:ln w="6600">
+                  <a:solidFill>
+                    <a:schemeClr val="accent2"/>
+                  </a:solidFill>
+                  <a:prstDash val="solid"/>
+                </a:ln>
+                <a:solidFill>
+                  <a:srgbClr val="FFFFFF"/>
+                </a:solidFill>
+                <a:effectLst>
+                  <a:outerShdw dist="38100" dir="2700000" algn="tl" rotWithShape="0">
+                    <a:schemeClr val="accent2"/>
+                  </a:outerShdw>
+                </a:effectLst>
+                <a:latin typeface="JetBrainsMono Nerd Font Mono" panose="02000009000000000000" charset="0"/>
+                <a:cs typeface="JetBrainsMono Nerd Font Mono" panose="02000009000000000000" charset="0"/>
+              </a:rPr>
+              <a:t>next</a:t>
+            </a:r>
+            <a:endParaRPr lang="en-US" altLang="zh-CN" sz="7200" b="1">
+              <a:ln w="6600">
+                <a:solidFill>
+                  <a:schemeClr val="accent2"/>
+                </a:solidFill>
+                <a:prstDash val="solid"/>
+              </a:ln>
+              <a:solidFill>
+                <a:srgbClr val="FFFFFF"/>
+              </a:solidFill>
+              <a:effectLst>
+                <a:outerShdw dist="38100" dir="2700000" algn="tl" rotWithShape="0">
+                  <a:schemeClr val="accent2"/>
+                </a:outerShdw>
+              </a:effectLst>
+              <a:latin typeface="JetBrainsMono Nerd Font Mono" panose="02000009000000000000" charset="0"/>
+              <a:cs typeface="JetBrainsMono Nerd Font Mono" panose="02000009000000000000" charset="0"/>
+            </a:endParaRPr>
+          </a:p>
+        </p:txBody>
+      </p:sp>
+    </p:spTree>
+  </p:cSld>
+  <p:clrMapOvr>
+    <a:masterClrMapping/>
+  </p:clrMapOvr>
+</p:sld>
+</file>
+
+<file path=ppt/slides/slide3.xml><?xml version="1.0" encoding="utf-8"?>
 <p:sld xmlns:a="http://schemas.openxmlformats.org/drawingml/2006/main" xmlns:r="http://schemas.openxmlformats.org/officeDocument/2006/relationships" xmlns:p="http://schemas.openxmlformats.org/presentationml/2006/main">
   <p:cSld>
     <p:bg>

--- a/src/logo-v2.pptx
+++ b/src/logo-v2.pptx
@@ -5,15 +5,16 @@
     <p:sldMasterId id="2147483648" r:id="rId1"/>
   </p:sldMasterIdLst>
   <p:notesMasterIdLst>
-    <p:notesMasterId r:id="rId6"/>
+    <p:notesMasterId r:id="rId7"/>
   </p:notesMasterIdLst>
   <p:handoutMasterIdLst>
-    <p:handoutMasterId r:id="rId7"/>
+    <p:handoutMasterId r:id="rId8"/>
   </p:handoutMasterIdLst>
   <p:sldIdLst>
     <p:sldId id="256" r:id="rId3"/>
     <p:sldId id="259" r:id="rId4"/>
     <p:sldId id="258" r:id="rId5"/>
+    <p:sldId id="260" r:id="rId6"/>
   </p:sldIdLst>
   <p:sldSz cx="12192000" cy="6858000"/>
   <p:notesSz cx="7103745" cy="10234295"/>
@@ -3690,6 +3691,69 @@
           </a:p>
         </p:txBody>
       </p:sp>
+      <p:sp>
+        <p:nvSpPr>
+          <p:cNvPr id="2" name="矩形 1"/>
+          <p:cNvSpPr/>
+          <p:nvPr/>
+        </p:nvSpPr>
+        <p:spPr>
+          <a:xfrm>
+            <a:off x="0" y="0"/>
+            <a:ext cx="2011680" cy="1198880"/>
+          </a:xfrm>
+          <a:prstGeom prst="rect">
+            <a:avLst/>
+          </a:prstGeom>
+          <a:noFill/>
+          <a:ln>
+            <a:noFill/>
+          </a:ln>
+        </p:spPr>
+        <p:txBody>
+          <a:bodyPr wrap="none" rtlCol="0" anchor="t">
+            <a:spAutoFit/>
+          </a:bodyPr>
+          <a:p>
+            <a:pPr algn="ctr"/>
+            <a:r>
+              <a:rPr lang="zh-CN" altLang="en-US" sz="7200" b="1">
+                <a:ln w="6600">
+                  <a:solidFill>
+                    <a:schemeClr val="accent2"/>
+                  </a:solidFill>
+                  <a:prstDash val="solid"/>
+                </a:ln>
+                <a:solidFill>
+                  <a:srgbClr val="FFFFFF"/>
+                </a:solidFill>
+                <a:effectLst>
+                  <a:outerShdw dist="38100" dir="2700000" algn="tl" rotWithShape="0">
+                    <a:schemeClr val="accent2"/>
+                  </a:outerShdw>
+                </a:effectLst>
+              </a:rPr>
+              <a:t>默认</a:t>
+            </a:r>
+            <a:endParaRPr lang="zh-CN" altLang="en-US" sz="7200" b="1">
+              <a:ln w="6600">
+                <a:solidFill>
+                  <a:schemeClr val="accent2"/>
+                </a:solidFill>
+                <a:prstDash val="solid"/>
+              </a:ln>
+              <a:solidFill>
+                <a:srgbClr val="FFFFFF"/>
+              </a:solidFill>
+              <a:effectLst>
+                <a:outerShdw dist="38100" dir="2700000" algn="tl" rotWithShape="0">
+                  <a:schemeClr val="accent2"/>
+                </a:outerShdw>
+              </a:effectLst>
+            </a:endParaRPr>
+          </a:p>
+        </p:txBody>
+      </p:sp>
     </p:spTree>
   </p:cSld>
   <p:clrMapOvr>
@@ -3930,6 +3994,107 @@
               </a:effectLst>
               <a:latin typeface="JetBrainsMono Nerd Font Mono" panose="02000009000000000000" charset="0"/>
               <a:cs typeface="JetBrainsMono Nerd Font Mono" panose="02000009000000000000" charset="0"/>
+            </a:endParaRPr>
+          </a:p>
+        </p:txBody>
+      </p:sp>
+      <p:sp>
+        <p:nvSpPr>
+          <p:cNvPr id="2" name="矩形 1"/>
+          <p:cNvSpPr/>
+          <p:nvPr/>
+        </p:nvSpPr>
+        <p:spPr>
+          <a:xfrm>
+            <a:off x="0" y="0"/>
+            <a:ext cx="4961890" cy="1198880"/>
+          </a:xfrm>
+          <a:prstGeom prst="rect">
+            <a:avLst/>
+          </a:prstGeom>
+          <a:noFill/>
+          <a:ln>
+            <a:noFill/>
+          </a:ln>
+        </p:spPr>
+        <p:txBody>
+          <a:bodyPr wrap="none" rtlCol="0" anchor="t">
+            <a:spAutoFit/>
+          </a:bodyPr>
+          <a:p>
+            <a:pPr algn="ctr"/>
+            <a:r>
+              <a:rPr lang="zh-CN" altLang="en-US" sz="7200" b="1">
+                <a:ln w="6600">
+                  <a:solidFill>
+                    <a:schemeClr val="accent2"/>
+                  </a:solidFill>
+                  <a:prstDash val="solid"/>
+                </a:ln>
+                <a:solidFill>
+                  <a:srgbClr val="FFFFFF"/>
+                </a:solidFill>
+                <a:effectLst>
+                  <a:outerShdw dist="38100" dir="2700000" algn="tl" rotWithShape="0">
+                    <a:schemeClr val="accent2"/>
+                  </a:outerShdw>
+                </a:effectLst>
+              </a:rPr>
+              <a:t>默认</a:t>
+            </a:r>
+            <a:r>
+              <a:rPr lang="en-US" altLang="zh-CN" sz="7200" b="1">
+                <a:ln w="6600">
+                  <a:solidFill>
+                    <a:schemeClr val="accent2"/>
+                  </a:solidFill>
+                  <a:prstDash val="solid"/>
+                </a:ln>
+                <a:solidFill>
+                  <a:srgbClr val="FFFFFF"/>
+                </a:solidFill>
+                <a:effectLst>
+                  <a:outerShdw dist="38100" dir="2700000" algn="tl" rotWithShape="0">
+                    <a:schemeClr val="accent2"/>
+                  </a:outerShdw>
+                </a:effectLst>
+              </a:rPr>
+              <a:t> </a:t>
+            </a:r>
+            <a:r>
+              <a:rPr lang="zh-CN" altLang="en-US" sz="7200" b="1">
+                <a:ln w="6600">
+                  <a:solidFill>
+                    <a:schemeClr val="accent2"/>
+                  </a:solidFill>
+                  <a:prstDash val="solid"/>
+                </a:ln>
+                <a:solidFill>
+                  <a:srgbClr val="FFFFFF"/>
+                </a:solidFill>
+                <a:effectLst>
+                  <a:outerShdw dist="38100" dir="2700000" algn="tl" rotWithShape="0">
+                    <a:schemeClr val="accent2"/>
+                  </a:outerShdw>
+                </a:effectLst>
+              </a:rPr>
+              <a:t>无边框</a:t>
+            </a:r>
+            <a:endParaRPr lang="zh-CN" altLang="en-US" sz="7200" b="1">
+              <a:ln w="6600">
+                <a:solidFill>
+                  <a:schemeClr val="accent2"/>
+                </a:solidFill>
+                <a:prstDash val="solid"/>
+              </a:ln>
+              <a:solidFill>
+                <a:srgbClr val="FFFFFF"/>
+              </a:solidFill>
+              <a:effectLst>
+                <a:outerShdw dist="38100" dir="2700000" algn="tl" rotWithShape="0">
+                  <a:schemeClr val="accent2"/>
+                </a:outerShdw>
+              </a:effectLst>
             </a:endParaRPr>
           </a:p>
         </p:txBody>
@@ -4172,6 +4337,428 @@
               </a:effectLst>
               <a:latin typeface="JetBrainsMono Nerd Font Mono" panose="02000009000000000000" charset="0"/>
               <a:cs typeface="JetBrainsMono Nerd Font Mono" panose="02000009000000000000" charset="0"/>
+            </a:endParaRPr>
+          </a:p>
+        </p:txBody>
+      </p:sp>
+      <p:sp>
+        <p:nvSpPr>
+          <p:cNvPr id="2" name="矩形 1"/>
+          <p:cNvSpPr/>
+          <p:nvPr/>
+        </p:nvSpPr>
+        <p:spPr>
+          <a:xfrm>
+            <a:off x="0" y="0"/>
+            <a:ext cx="4047490" cy="1198880"/>
+          </a:xfrm>
+          <a:prstGeom prst="rect">
+            <a:avLst/>
+          </a:prstGeom>
+          <a:noFill/>
+          <a:ln>
+            <a:noFill/>
+          </a:ln>
+        </p:spPr>
+        <p:txBody>
+          <a:bodyPr wrap="none" rtlCol="0" anchor="t">
+            <a:spAutoFit/>
+          </a:bodyPr>
+          <a:p>
+            <a:pPr algn="ctr"/>
+            <a:r>
+              <a:rPr lang="zh-CN" altLang="en-US" sz="7200" b="1">
+                <a:ln w="6600">
+                  <a:solidFill>
+                    <a:schemeClr val="accent2"/>
+                  </a:solidFill>
+                  <a:prstDash val="solid"/>
+                </a:ln>
+                <a:solidFill>
+                  <a:srgbClr val="FFFFFF"/>
+                </a:solidFill>
+                <a:effectLst>
+                  <a:outerShdw dist="38100" dir="2700000" algn="tl" rotWithShape="0">
+                    <a:schemeClr val="accent2"/>
+                  </a:outerShdw>
+                </a:effectLst>
+              </a:rPr>
+              <a:t>默认</a:t>
+            </a:r>
+            <a:r>
+              <a:rPr lang="en-US" altLang="zh-CN" sz="7200" b="1">
+                <a:ln w="6600">
+                  <a:solidFill>
+                    <a:schemeClr val="accent2"/>
+                  </a:solidFill>
+                  <a:prstDash val="solid"/>
+                </a:ln>
+                <a:solidFill>
+                  <a:srgbClr val="FFFFFF"/>
+                </a:solidFill>
+                <a:effectLst>
+                  <a:outerShdw dist="38100" dir="2700000" algn="tl" rotWithShape="0">
+                    <a:schemeClr val="accent2"/>
+                  </a:outerShdw>
+                </a:effectLst>
+              </a:rPr>
+              <a:t> </a:t>
+            </a:r>
+            <a:r>
+              <a:rPr lang="zh-CN" altLang="en-US" sz="7200" b="1">
+                <a:ln w="6600">
+                  <a:solidFill>
+                    <a:schemeClr val="accent2"/>
+                  </a:solidFill>
+                  <a:prstDash val="solid"/>
+                </a:ln>
+                <a:solidFill>
+                  <a:srgbClr val="FFFFFF"/>
+                </a:solidFill>
+                <a:effectLst>
+                  <a:outerShdw dist="38100" dir="2700000" algn="tl" rotWithShape="0">
+                    <a:schemeClr val="accent2"/>
+                  </a:outerShdw>
+                </a:effectLst>
+              </a:rPr>
+              <a:t>黄色</a:t>
+            </a:r>
+            <a:endParaRPr lang="zh-CN" altLang="en-US" sz="7200" b="1">
+              <a:ln w="6600">
+                <a:solidFill>
+                  <a:schemeClr val="accent2"/>
+                </a:solidFill>
+                <a:prstDash val="solid"/>
+              </a:ln>
+              <a:solidFill>
+                <a:srgbClr val="FFFFFF"/>
+              </a:solidFill>
+              <a:effectLst>
+                <a:outerShdw dist="38100" dir="2700000" algn="tl" rotWithShape="0">
+                  <a:schemeClr val="accent2"/>
+                </a:outerShdw>
+              </a:effectLst>
+            </a:endParaRPr>
+          </a:p>
+        </p:txBody>
+      </p:sp>
+    </p:spTree>
+  </p:cSld>
+  <p:clrMapOvr>
+    <a:masterClrMapping/>
+  </p:clrMapOvr>
+</p:sld>
+</file>
+
+<file path=ppt/slides/slide4.xml><?xml version="1.0" encoding="utf-8"?>
+<p:sld xmlns:a="http://schemas.openxmlformats.org/drawingml/2006/main" xmlns:r="http://schemas.openxmlformats.org/officeDocument/2006/relationships" xmlns:p="http://schemas.openxmlformats.org/presentationml/2006/main">
+  <p:cSld>
+    <p:bg>
+      <p:bgPr>
+        <a:solidFill>
+          <a:schemeClr val="bg2">
+            <a:lumMod val="50000"/>
+          </a:schemeClr>
+        </a:solidFill>
+        <a:effectLst/>
+      </p:bgPr>
+    </p:bg>
+    <p:spTree>
+      <p:nvGrpSpPr>
+        <p:cNvPr id="1" name=""/>
+        <p:cNvGrpSpPr/>
+        <p:nvPr/>
+      </p:nvGrpSpPr>
+      <p:grpSpPr>
+        <a:xfrm>
+          <a:off x="0" y="0"/>
+          <a:ext cx="0" cy="0"/>
+          <a:chOff x="0" y="0"/>
+          <a:chExt cx="0" cy="0"/>
+        </a:xfrm>
+      </p:grpSpPr>
+      <p:sp>
+        <p:nvSpPr>
+          <p:cNvPr id="3" name="圆角矩形 2"/>
+          <p:cNvSpPr/>
+          <p:nvPr/>
+        </p:nvSpPr>
+        <p:spPr>
+          <a:xfrm>
+            <a:off x="4047490" y="1380490"/>
+            <a:ext cx="4097655" cy="4097655"/>
+          </a:xfrm>
+          <a:prstGeom prst="roundRect">
+            <a:avLst>
+              <a:gd name="adj" fmla="val 13776"/>
+            </a:avLst>
+          </a:prstGeom>
+          <a:solidFill>
+            <a:schemeClr val="bg1">
+              <a:lumMod val="95000"/>
+            </a:schemeClr>
+          </a:solidFill>
+          <a:ln w="88900">
+            <a:solidFill>
+              <a:schemeClr val="bg1">
+                <a:lumMod val="85000"/>
+              </a:schemeClr>
+            </a:solidFill>
+          </a:ln>
+          <a:effectLst>
+            <a:outerShdw blurRad="50800" dist="38100" dir="2700000" algn="tl" rotWithShape="0">
+              <a:prstClr val="black">
+                <a:alpha val="40000"/>
+              </a:prstClr>
+            </a:outerShdw>
+          </a:effectLst>
+        </p:spPr>
+        <p:style>
+          <a:lnRef idx="2">
+            <a:schemeClr val="accent1">
+              <a:lumMod val="75000"/>
+            </a:schemeClr>
+          </a:lnRef>
+          <a:fillRef idx="1">
+            <a:schemeClr val="accent1"/>
+          </a:fillRef>
+          <a:effectRef idx="0">
+            <a:srgbClr val="FFFFFF"/>
+          </a:effectRef>
+          <a:fontRef idx="minor">
+            <a:schemeClr val="lt1"/>
+          </a:fontRef>
+        </p:style>
+        <p:txBody>
+          <a:bodyPr rtlCol="0" anchor="ctr"/>
+          <a:p>
+            <a:pPr algn="ctr"/>
+            <a:endParaRPr lang="zh-CN" altLang="en-US">
+              <a:ln>
+                <a:solidFill>
+                  <a:schemeClr val="bg1">
+                    <a:lumMod val="85000"/>
+                  </a:schemeClr>
+                </a:solidFill>
+              </a:ln>
+            </a:endParaRPr>
+          </a:p>
+        </p:txBody>
+      </p:sp>
+      <p:sp>
+        <p:nvSpPr>
+          <p:cNvPr id="4" name="文本框 3"/>
+          <p:cNvSpPr txBox="1"/>
+          <p:nvPr/>
+        </p:nvSpPr>
+        <p:spPr>
+          <a:xfrm>
+            <a:off x="4064318" y="1950085"/>
+            <a:ext cx="4064000" cy="1938020"/>
+          </a:xfrm>
+          <a:prstGeom prst="rect">
+            <a:avLst/>
+          </a:prstGeom>
+          <a:noFill/>
+          <a:effectLst>
+            <a:outerShdw blurRad="50800" dist="38100" dir="2700000" algn="tl" rotWithShape="0">
+              <a:prstClr val="black">
+                <a:alpha val="40000"/>
+              </a:prstClr>
+            </a:outerShdw>
+          </a:effectLst>
+        </p:spPr>
+        <p:txBody>
+          <a:bodyPr wrap="square" rtlCol="0">
+            <a:spAutoFit/>
+            <a:scene3d>
+              <a:camera prst="orthographicFront"/>
+              <a:lightRig rig="threePt" dir="t"/>
+            </a:scene3d>
+          </a:bodyPr>
+          <a:p>
+            <a:pPr algn="ctr"/>
+            <a:r>
+              <a:rPr lang="en-US" altLang="zh-CN" sz="12000" b="1">
+                <a:ln w="15875"/>
+                <a:gradFill>
+                  <a:gsLst>
+                    <a:gs pos="0">
+                      <a:schemeClr val="accent1">
+                        <a:hueMod val="80000"/>
+                      </a:schemeClr>
+                    </a:gs>
+                    <a:gs pos="100000">
+                      <a:schemeClr val="accent1">
+                        <a:alpha val="100000"/>
+                      </a:schemeClr>
+                    </a:gs>
+                  </a:gsLst>
+                  <a:lin ang="2700000" scaled="0"/>
+                </a:gradFill>
+                <a:effectLst/>
+                <a:latin typeface="Font Awesome 7 Brands" panose="02000503000000000000" charset="0"/>
+                <a:cs typeface="Font Awesome 7 Brands" panose="02000503000000000000" charset="0"/>
+              </a:rPr>
+              <a:t>123</a:t>
+            </a:r>
+            <a:endParaRPr lang="en-US" altLang="zh-CN" sz="12000" b="1">
+              <a:ln w="15875"/>
+              <a:gradFill>
+                <a:gsLst>
+                  <a:gs pos="0">
+                    <a:schemeClr val="accent1">
+                      <a:hueMod val="80000"/>
+                    </a:schemeClr>
+                  </a:gs>
+                  <a:gs pos="100000">
+                    <a:schemeClr val="accent1">
+                      <a:alpha val="100000"/>
+                    </a:schemeClr>
+                  </a:gs>
+                </a:gsLst>
+                <a:lin ang="2700000" scaled="0"/>
+              </a:gradFill>
+              <a:effectLst/>
+              <a:latin typeface="Font Awesome 7 Brands" panose="02000503000000000000" charset="0"/>
+              <a:cs typeface="Font Awesome 7 Brands" panose="02000503000000000000" charset="0"/>
+            </a:endParaRPr>
+          </a:p>
+        </p:txBody>
+      </p:sp>
+      <p:sp>
+        <p:nvSpPr>
+          <p:cNvPr id="6" name="矩形 5"/>
+          <p:cNvSpPr/>
+          <p:nvPr/>
+        </p:nvSpPr>
+        <p:spPr>
+          <a:xfrm>
+            <a:off x="4907598" y="3622675"/>
+            <a:ext cx="2377440" cy="1198880"/>
+          </a:xfrm>
+          <a:prstGeom prst="rect">
+            <a:avLst/>
+          </a:prstGeom>
+          <a:noFill/>
+          <a:ln>
+            <a:noFill/>
+          </a:ln>
+          <a:effectLst>
+            <a:outerShdw blurRad="50800" dist="38100" dir="2700000" algn="tl" rotWithShape="0">
+              <a:prstClr val="black">
+                <a:alpha val="40000"/>
+              </a:prstClr>
+            </a:outerShdw>
+          </a:effectLst>
+        </p:spPr>
+        <p:txBody>
+          <a:bodyPr wrap="none" rtlCol="0" anchor="t">
+            <a:spAutoFit/>
+          </a:bodyPr>
+          <a:p>
+            <a:pPr algn="ctr"/>
+            <a:r>
+              <a:rPr lang="en-US" altLang="zh-CN" sz="7200" b="1">
+                <a:ln w="6600">
+                  <a:solidFill>
+                    <a:schemeClr val="accent2"/>
+                  </a:solidFill>
+                  <a:prstDash val="solid"/>
+                </a:ln>
+                <a:solidFill>
+                  <a:srgbClr val="FFFFFF"/>
+                </a:solidFill>
+                <a:effectLst>
+                  <a:outerShdw dist="38100" dir="2700000" algn="tl" rotWithShape="0">
+                    <a:schemeClr val="accent2"/>
+                  </a:outerShdw>
+                </a:effectLst>
+                <a:latin typeface="JetBrainsMono Nerd Font Mono" panose="02000009000000000000" charset="0"/>
+                <a:cs typeface="JetBrainsMono Nerd Font Mono" panose="02000009000000000000" charset="0"/>
+              </a:rPr>
+              <a:t>next</a:t>
+            </a:r>
+            <a:endParaRPr lang="en-US" altLang="zh-CN" sz="7200" b="1">
+              <a:ln w="6600">
+                <a:solidFill>
+                  <a:schemeClr val="accent2"/>
+                </a:solidFill>
+                <a:prstDash val="solid"/>
+              </a:ln>
+              <a:solidFill>
+                <a:srgbClr val="FFFFFF"/>
+              </a:solidFill>
+              <a:effectLst>
+                <a:outerShdw dist="38100" dir="2700000" algn="tl" rotWithShape="0">
+                  <a:schemeClr val="accent2"/>
+                </a:outerShdw>
+              </a:effectLst>
+              <a:latin typeface="JetBrainsMono Nerd Font Mono" panose="02000009000000000000" charset="0"/>
+              <a:cs typeface="JetBrainsMono Nerd Font Mono" panose="02000009000000000000" charset="0"/>
+            </a:endParaRPr>
+          </a:p>
+        </p:txBody>
+      </p:sp>
+      <p:sp>
+        <p:nvSpPr>
+          <p:cNvPr id="2" name="矩形 1"/>
+          <p:cNvSpPr/>
+          <p:nvPr/>
+        </p:nvSpPr>
+        <p:spPr>
+          <a:xfrm>
+            <a:off x="0" y="0"/>
+            <a:ext cx="2011680" cy="1198880"/>
+          </a:xfrm>
+          <a:prstGeom prst="rect">
+            <a:avLst/>
+          </a:prstGeom>
+          <a:noFill/>
+          <a:ln>
+            <a:noFill/>
+          </a:ln>
+        </p:spPr>
+        <p:txBody>
+          <a:bodyPr wrap="none" rtlCol="0" anchor="t">
+            <a:spAutoFit/>
+          </a:bodyPr>
+          <a:p>
+            <a:pPr algn="ctr"/>
+            <a:r>
+              <a:rPr lang="zh-CN" sz="7200" b="1">
+                <a:ln w="6600">
+                  <a:solidFill>
+                    <a:schemeClr val="accent2"/>
+                  </a:solidFill>
+                  <a:prstDash val="solid"/>
+                </a:ln>
+                <a:solidFill>
+                  <a:srgbClr val="FFFFFF"/>
+                </a:solidFill>
+                <a:effectLst>
+                  <a:outerShdw dist="38100" dir="2700000" algn="tl" rotWithShape="0">
+                    <a:schemeClr val="accent2"/>
+                  </a:outerShdw>
+                </a:effectLst>
+              </a:rPr>
+              <a:t>白色</a:t>
+            </a:r>
+            <a:endParaRPr lang="zh-CN" sz="7200" b="1">
+              <a:ln w="6600">
+                <a:solidFill>
+                  <a:schemeClr val="accent2"/>
+                </a:solidFill>
+                <a:prstDash val="solid"/>
+              </a:ln>
+              <a:solidFill>
+                <a:srgbClr val="FFFFFF"/>
+              </a:solidFill>
+              <a:effectLst>
+                <a:outerShdw dist="38100" dir="2700000" algn="tl" rotWithShape="0">
+                  <a:schemeClr val="accent2"/>
+                </a:outerShdw>
+              </a:effectLst>
             </a:endParaRPr>
           </a:p>
         </p:txBody>
